--- a/presentation/Train_System_Presentation-F2.pptx
+++ b/presentation/Train_System_Presentation-F2.pptx
@@ -5474,7 +5474,7 @@
                 <a:ea typeface="Calibri" pitchFamily="34" charset="-122"/>
                 <a:cs typeface="Calibri" pitchFamily="34" charset="-120"/>
               </a:rPr>
-              <a:t>30</a:t>
+              <a:t>32</a:t>
             </a:r>
             <a:endParaRPr lang="en-US" sz="3600" dirty="0"/>
           </a:p>
@@ -6862,7 +6862,7 @@
         <p:spPr>
           <a:xfrm>
             <a:off x="6263640" y="3337560"/>
-            <a:ext cx="2286000" cy="1051560"/>
+            <a:ext cx="2286000" cy="507831"/>
           </a:xfrm>
           <a:prstGeom prst="rect">
             <a:avLst/>
@@ -6877,13 +6877,13 @@
           <a:p>
             <a:pPr algn="l"/>
             <a:r>
-              <a:rPr sz="1100" b="0" i="0">
+              <a:rPr sz="1100" b="0" i="0" dirty="0">
                 <a:solidFill>
                   <a:srgbClr val="5C6F82"/>
                 </a:solidFill>
                 <a:latin typeface="Calibri"/>
               </a:rPr>
-              <a:t>Hosted with proper DNS routing and HTTPS, so the deployment behaves like a real product rather than a school project.</a:t>
+              <a:t>Hosted with proper DNS routing and HTTPS, so the deployment behaves like a real product</a:t>
             </a:r>
           </a:p>
         </p:txBody>

--- a/presentation/Train_System_Presentation-F2.pptx
+++ b/presentation/Train_System_Presentation-F2.pptx
@@ -14916,7 +14916,7 @@
                 <a:ea typeface="Calibri" pitchFamily="34" charset="-122"/>
                 <a:cs typeface="Calibri" pitchFamily="34" charset="-120"/>
               </a:rPr>
-              <a:t>Passenger</a:t>
+              <a:t>Both</a:t>
             </a:r>
             <a:endParaRPr lang="en-US" sz="1000" dirty="0"/>
           </a:p>

--- a/presentation/Train_System_Presentation-F2.pptx
+++ b/presentation/Train_System_Presentation-F2.pptx
@@ -5474,7 +5474,7 @@
                 <a:ea typeface="Calibri" pitchFamily="34" charset="-122"/>
                 <a:cs typeface="Calibri" pitchFamily="34" charset="-120"/>
               </a:rPr>
-              <a:t>32</a:t>
+              <a:t>35</a:t>
             </a:r>
             <a:endParaRPr lang="en-US" sz="3600" dirty="0"/>
           </a:p>
